--- a/docs/pitch-decks/investor-500/pptx/421-point72.pptx
+++ b/docs/pitch-decks/investor-500/pptx/421-point72.pptx
@@ -7,6 +7,7 @@
   <p:sldIdLst>
     <p:sldId id="256" r:id="rId2"/>
     <p:sldId id="257" r:id="rId3"/>
+    <p:sldId id="266" r:id="rId17"/>
     <p:sldId id="258" r:id="rId4"/>
     <p:sldId id="259" r:id="rId5"/>
     <p:sldId id="260" r:id="rId6"/>
@@ -2593,6 +2594,433 @@
 </p:sld>
 </file>
 
+<file path=ppt/slides/slide11.xml><?xml version="1.0" encoding="utf-8"?>
+<p:sld xmlns:a="http://schemas.openxmlformats.org/drawingml/2006/main" xmlns:p="http://schemas.openxmlformats.org/presentationml/2006/main" xmlns:r="http://schemas.openxmlformats.org/officeDocument/2006/relationships">
+  <p:cSld>
+    <p:spTree>
+      <p:nvGrpSpPr>
+        <p:cNvPr id="1" name=""/>
+        <p:cNvGrpSpPr/>
+        <p:nvPr/>
+      </p:nvGrpSpPr>
+      <p:grpSpPr/>
+      <p:sp>
+        <p:nvSpPr>
+          <p:cNvPr id="2" name="Rectangle 1"/>
+          <p:cNvSpPr/>
+          <p:nvPr/>
+        </p:nvSpPr>
+        <p:spPr>
+          <a:xfrm>
+            <a:off x="0" y="0"/>
+            <a:ext cx="12188952" cy="6858000"/>
+          </a:xfrm>
+          <a:prstGeom prst="rect">
+            <a:avLst/>
+          </a:prstGeom>
+          <a:solidFill>
+            <a:srgbClr val="0A0A0A"/>
+          </a:solidFill>
+          <a:ln>
+            <a:noFill/>
+          </a:ln>
+        </p:spPr>
+        <p:style>
+          <a:lnRef idx="1">
+            <a:schemeClr val="accent1"/>
+          </a:lnRef>
+          <a:fillRef idx="3">
+            <a:schemeClr val="accent1"/>
+          </a:fillRef>
+          <a:effectRef idx="2">
+            <a:schemeClr val="accent1"/>
+          </a:effectRef>
+          <a:fontRef idx="minor">
+            <a:schemeClr val="lt1"/>
+          </a:fontRef>
+        </p:style>
+        <p:txBody>
+          <a:bodyPr rtlCol="0" anchor="ctr"/>
+          <a:lstStyle/>
+          <a:p>
+            <a:pPr algn="ctr"/>
+          </a:p>
+        </p:txBody>
+      </p:sp>
+      <p:sp>
+        <p:nvSpPr>
+          <p:cNvPr id="3" name="TextBox 2"/>
+          <p:cNvSpPr txBox="1"/>
+          <p:nvPr/>
+        </p:nvSpPr>
+        <p:spPr>
+          <a:xfrm>
+            <a:off x="457200" y="274320"/>
+            <a:ext cx="10972800" cy="731520"/>
+          </a:xfrm>
+          <a:prstGeom prst="rect">
+            <a:avLst/>
+          </a:prstGeom>
+          <a:noFill/>
+        </p:spPr>
+        <p:txBody>
+          <a:bodyPr wrap="none">
+            <a:spAutoFit/>
+          </a:bodyPr>
+          <a:lstStyle/>
+          <a:p>
+            <a:pPr>
+              <a:defRPr sz="3600" b="1">
+                <a:solidFill>
+                  <a:srgbClr val="D4AF37"/>
+                </a:solidFill>
+              </a:defRPr>
+            </a:pPr>
+            <a:r>
+              <a:t>THE MARKET: Why Now, Why Big</a:t>
+            </a:r>
+          </a:p>
+        </p:txBody>
+      </p:sp>
+      <p:sp>
+        <p:nvSpPr>
+          <p:cNvPr id="4" name="TextBox 3"/>
+          <p:cNvSpPr txBox="1"/>
+          <p:nvPr/>
+        </p:nvSpPr>
+        <p:spPr>
+          <a:xfrm>
+            <a:off x="457200" y="914400"/>
+            <a:ext cx="10972800" cy="457200"/>
+          </a:xfrm>
+          <a:prstGeom prst="rect">
+            <a:avLst/>
+          </a:prstGeom>
+          <a:noFill/>
+        </p:spPr>
+        <p:txBody>
+          <a:bodyPr wrap="none">
+            <a:spAutoFit/>
+          </a:bodyPr>
+          <a:lstStyle/>
+          <a:p>
+            <a:pPr>
+              <a:defRPr sz="1800">
+                <a:solidFill>
+                  <a:srgbClr val="B4B4B4"/>
+                </a:solidFill>
+              </a:defRPr>
+            </a:pPr>
+            <a:r>
+              <a:t>Regulatory convergence creates a must-have moment for AI governance</a:t>
+            </a:r>
+          </a:p>
+        </p:txBody>
+      </p:sp>
+      <p:sp>
+        <p:nvSpPr>
+          <p:cNvPr id="5" name="TextBox 4"/>
+          <p:cNvSpPr txBox="1"/>
+          <p:nvPr/>
+        </p:nvSpPr>
+        <p:spPr>
+          <a:xfrm>
+            <a:off x="457200" y="1554480"/>
+            <a:ext cx="5029200" cy="457200"/>
+          </a:xfrm>
+          <a:prstGeom prst="rect">
+            <a:avLst/>
+          </a:prstGeom>
+          <a:noFill/>
+        </p:spPr>
+        <p:txBody>
+          <a:bodyPr wrap="none">
+            <a:spAutoFit/>
+          </a:bodyPr>
+          <a:lstStyle/>
+          <a:p>
+            <a:pPr>
+              <a:defRPr sz="2200" b="1">
+                <a:solidFill>
+                  <a:srgbClr val="FFFFFF"/>
+                </a:solidFill>
+              </a:defRPr>
+            </a:pPr>
+            <a:r>
+              <a:t>Regulatory Forcing Functions</a:t>
+            </a:r>
+          </a:p>
+        </p:txBody>
+      </p:sp>
+      <p:sp>
+        <p:nvSpPr>
+          <p:cNvPr id="6" name="TextBox 5"/>
+          <p:cNvSpPr txBox="1"/>
+          <p:nvPr/>
+        </p:nvSpPr>
+        <p:spPr>
+          <a:xfrm>
+            <a:off x="457200" y="2103120"/>
+            <a:ext cx="5029200" cy="4114800"/>
+          </a:xfrm>
+          <a:prstGeom prst="rect">
+            <a:avLst/>
+          </a:prstGeom>
+          <a:noFill/>
+        </p:spPr>
+        <p:txBody>
+          <a:bodyPr wrap="square">
+            <a:spAutoFit/>
+          </a:bodyPr>
+          <a:lstStyle/>
+          <a:p>
+            <a:pPr>
+              <a:spcAft>
+                <a:spcPts val="1000"/>
+              </a:spcAft>
+              <a:defRPr sz="1600">
+                <a:solidFill>
+                  <a:srgbClr val="FFFFFF"/>
+                </a:solidFill>
+              </a:defRPr>
+            </a:pPr>
+            <a:r>
+              <a:t>• EU AI Act — High-risk AI governance mandatory (Aug 2026)</a:t>
+            </a:r>
+          </a:p>
+          <a:p>
+            <a:pPr>
+              <a:spcAft>
+                <a:spcPts val="1000"/>
+              </a:spcAft>
+              <a:defRPr sz="1600">
+                <a:solidFill>
+                  <a:srgbClr val="FFFFFF"/>
+                </a:solidFill>
+              </a:defRPr>
+            </a:pPr>
+            <a:r>
+              <a:t>• Penalties: €35M or 7% of global turnover (Article 99(3))</a:t>
+            </a:r>
+          </a:p>
+          <a:p>
+            <a:pPr>
+              <a:spcAft>
+                <a:spcPts val="1000"/>
+              </a:spcAft>
+              <a:defRPr sz="1600">
+                <a:solidFill>
+                  <a:srgbClr val="FFFFFF"/>
+                </a:solidFill>
+              </a:defRPr>
+            </a:pPr>
+            <a:r>
+              <a:t>• SEC cyber disclosure — 4 business days to report</a:t>
+            </a:r>
+          </a:p>
+          <a:p>
+            <a:pPr>
+              <a:spcAft>
+                <a:spcPts val="1000"/>
+              </a:spcAft>
+              <a:defRPr sz="1600">
+                <a:solidFill>
+                  <a:srgbClr val="FFFFFF"/>
+                </a:solidFill>
+              </a:defRPr>
+            </a:pPr>
+            <a:r>
+              <a:t>• AI Executive Order 14110 — federal AI transparency</a:t>
+            </a:r>
+          </a:p>
+          <a:p>
+            <a:pPr>
+              <a:spcAft>
+                <a:spcPts val="1000"/>
+              </a:spcAft>
+              <a:defRPr sz="1600">
+                <a:solidFill>
+                  <a:srgbClr val="FFFFFF"/>
+                </a:solidFill>
+              </a:defRPr>
+            </a:pPr>
+            <a:r>
+              <a:t>• Peru DS 115-2025-PCM — AI governance enacted</a:t>
+            </a:r>
+          </a:p>
+          <a:p>
+            <a:pPr>
+              <a:spcAft>
+                <a:spcPts val="1000"/>
+              </a:spcAft>
+              <a:defRPr sz="1600">
+                <a:solidFill>
+                  <a:srgbClr val="FFFFFF"/>
+                </a:solidFill>
+              </a:defRPr>
+            </a:pPr>
+            <a:r>
+              <a:t>• DORA (Jan 2025) — ICT risk for EU financial services</a:t>
+            </a:r>
+          </a:p>
+        </p:txBody>
+      </p:sp>
+      <p:sp>
+        <p:nvSpPr>
+          <p:cNvPr id="7" name="TextBox 6"/>
+          <p:cNvSpPr txBox="1"/>
+          <p:nvPr/>
+        </p:nvSpPr>
+        <p:spPr>
+          <a:xfrm>
+            <a:off x="6217920" y="1554480"/>
+            <a:ext cx="5029200" cy="457200"/>
+          </a:xfrm>
+          <a:prstGeom prst="rect">
+            <a:avLst/>
+          </a:prstGeom>
+          <a:noFill/>
+        </p:spPr>
+        <p:txBody>
+          <a:bodyPr wrap="none">
+            <a:spAutoFit/>
+          </a:bodyPr>
+          <a:lstStyle/>
+          <a:p>
+            <a:pPr>
+              <a:defRPr sz="2200" b="1">
+                <a:solidFill>
+                  <a:srgbClr val="FFFFFF"/>
+                </a:solidFill>
+              </a:defRPr>
+            </a:pPr>
+            <a:r>
+              <a:t>The Opportunity</a:t>
+            </a:r>
+          </a:p>
+        </p:txBody>
+      </p:sp>
+      <p:sp>
+        <p:nvSpPr>
+          <p:cNvPr id="8" name="TextBox 7"/>
+          <p:cNvSpPr txBox="1"/>
+          <p:nvPr/>
+        </p:nvSpPr>
+        <p:spPr>
+          <a:xfrm>
+            <a:off x="6217920" y="2103120"/>
+            <a:ext cx="5029200" cy="4114800"/>
+          </a:xfrm>
+          <a:prstGeom prst="rect">
+            <a:avLst/>
+          </a:prstGeom>
+          <a:noFill/>
+        </p:spPr>
+        <p:txBody>
+          <a:bodyPr wrap="square">
+            <a:spAutoFit/>
+          </a:bodyPr>
+          <a:lstStyle/>
+          <a:p>
+            <a:pPr>
+              <a:spcAft>
+                <a:spcPts val="1000"/>
+              </a:spcAft>
+              <a:defRPr sz="1600">
+                <a:solidFill>
+                  <a:srgbClr val="FFFFFF"/>
+                </a:solidFill>
+              </a:defRPr>
+            </a:pPr>
+            <a:r>
+              <a:t>• Every enterprise deploying AI needs governance — not optional</a:t>
+            </a:r>
+          </a:p>
+          <a:p>
+            <a:pPr>
+              <a:spcAft>
+                <a:spcPts val="1000"/>
+              </a:spcAft>
+              <a:defRPr sz="1600">
+                <a:solidFill>
+                  <a:srgbClr val="FFFFFF"/>
+                </a:solidFill>
+              </a:defRPr>
+            </a:pPr>
+            <a:r>
+              <a:t>• 0 incumbent owns this category — greenfield</a:t>
+            </a:r>
+          </a:p>
+          <a:p>
+            <a:pPr>
+              <a:spcAft>
+                <a:spcPts val="1000"/>
+              </a:spcAft>
+              <a:defRPr sz="1600">
+                <a:solidFill>
+                  <a:srgbClr val="FFFFFF"/>
+                </a:solidFill>
+              </a:defRPr>
+            </a:pPr>
+            <a:r>
+              <a:t>• Financial services: Basel III + SR 11-7 + Reg BI</a:t>
+            </a:r>
+          </a:p>
+          <a:p>
+            <a:pPr>
+              <a:spcAft>
+                <a:spcPts val="1000"/>
+              </a:spcAft>
+              <a:defRPr sz="1600">
+                <a:solidFill>
+                  <a:srgbClr val="FFFFFF"/>
+                </a:solidFill>
+              </a:defRPr>
+            </a:pPr>
+            <a:r>
+              <a:t>• Healthcare: FDA SaMD + HIPAA audit requirements</a:t>
+            </a:r>
+          </a:p>
+          <a:p>
+            <a:pPr>
+              <a:spcAft>
+                <a:spcPts val="1000"/>
+              </a:spcAft>
+              <a:defRPr sz="1600">
+                <a:solidFill>
+                  <a:srgbClr val="FFFFFF"/>
+                </a:solidFill>
+              </a:defRPr>
+            </a:pPr>
+            <a:r>
+              <a:t>• Defense: FedRAMP + CMMC + ITAR</a:t>
+            </a:r>
+          </a:p>
+          <a:p>
+            <a:pPr>
+              <a:spcAft>
+                <a:spcPts val="1000"/>
+              </a:spcAft>
+              <a:defRPr sz="1600">
+                <a:solidFill>
+                  <a:srgbClr val="FFFFFF"/>
+                </a:solidFill>
+              </a:defRPr>
+            </a:pPr>
+            <a:r>
+              <a:t>• 12-18 month window before Big Tech bundles governance</a:t>
+            </a:r>
+          </a:p>
+        </p:txBody>
+      </p:sp>
+    </p:spTree>
+  </p:cSld>
+  <p:clrMapOvr>
+    <a:masterClrMapping/>
+  </p:clrMapOvr>
+</p:sld>
+</file>
+
 <file path=ppt/slides/slide2.xml><?xml version="1.0" encoding="utf-8"?>
 <p:sld xmlns:a="http://schemas.openxmlformats.org/drawingml/2006/main" xmlns:r="http://schemas.openxmlformats.org/officeDocument/2006/relationships" xmlns:p="http://schemas.openxmlformats.org/presentationml/2006/main">
   <p:cSld name="Slide 2">
@@ -6900,7 +7328,7 @@
                   <a:srgbClr val="8B8FA3"/>
                 </a:solidFill>
               </a:rPr>
-              <a:t>2 warm enterprise intros (financial institution, Big 4 channel). NVIDIA Inception member.</a:t>
+              <a:t>Active pipeline: KPMG channel partner (Peru financial services), enterprise prospect via Opal Collection introduction. NVIDIA Inception member.</a:t>
             </a:r>
             <a:endParaRPr lang="en-US" sz="1100" dirty="0"/>
           </a:p>
@@ -7037,7 +7465,7 @@
                   <a:srgbClr val="8B8FA3"/>
                 </a:solidFill>
               </a:rPr>
-              <a:t>$8.5M post-money · 21.5% dilution · Engineering risk resolved — GTM-stage investment.</a:t>
+              <a:t>$8.5M post-money · 17.6% dilution · Engineering risk resolved — GTM-stage investment.</a:t>
             </a:r>
             <a:endParaRPr lang="en-US" sz="1200" dirty="0"/>
           </a:p>

--- a/docs/pitch-decks/investor-500/pptx/421-point72.pptx
+++ b/docs/pitch-decks/investor-500/pptx/421-point72.pptx
@@ -2223,7 +2223,7 @@
                   <a:srgbClr val="8B8FA3"/>
                 </a:solidFill>
               </a:rPr>
-              <a:t>Prepared for POINT72 VENTURES — Steve Cohen tech venture arm</a:t>
+              <a:t>Prepared for POINT72 VENTURES — Decision evidence is the next infrastructure default — every enterprise deploying AI will be required to produce decision evidence under regulatory or legal challenge</a:t>
             </a:r>
             <a:endParaRPr lang="en-US" sz="1400" dirty="0"/>
           </a:p>
@@ -2794,7 +2794,7 @@
                   <a:srgbClr val="8B8FA3"/>
                 </a:solidFill>
               </a:rPr>
-              <a:t>AI is eating software. point72's dedicated AI fund backs infrastructure that becomes the default layer for enterprise AI adoption.</a:t>
+              <a:t>Point72 Ventures invests in venture capital opportunities. Datacendia is the missing governance layer for enterprise AI.</a:t>
             </a:r>
             <a:endParaRPr lang="en-US" sz="1200" dirty="0"/>
           </a:p>
@@ -3033,7 +3033,7 @@
                   <a:srgbClr val="D4AF37"/>
                 </a:solidFill>
               </a:rPr>
-              <a:t>Hex</a:t>
+              <a:t/>
             </a:r>
             <a:endParaRPr lang="en-US" sz="1100" dirty="0"/>
           </a:p>
@@ -3051,7 +3051,7 @@
                   <a:srgbClr val="D4AF37"/>
                 </a:solidFill>
               </a:rPr>
-              <a:t>dbt Labs</a:t>
+              <a:t/>
             </a:r>
             <a:endParaRPr lang="en-US" sz="1100" dirty="0"/>
           </a:p>
@@ -3069,7 +3069,7 @@
                   <a:srgbClr val="D4AF37"/>
                 </a:solidFill>
               </a:rPr>
-              <a:t>Replit</a:t>
+              <a:t/>
             </a:r>
             <a:endParaRPr lang="en-US" sz="1100" dirty="0"/>
           </a:p>
@@ -3108,7 +3108,7 @@
                   <a:srgbClr val="8B8FA3"/>
                 </a:solidFill>
               </a:rPr>
-              <a:t>point72 has backed the data stack (Data infra, dbt) and AI infra (Fintech). Datacendia completes the stack: decision evidence, accountability, and regulatory compliance for every AI decision.</a:t>
+              <a:t>point72 portfolio includes Data infra. Datacendia completes the stack with AI governance and audit.</a:t>
             </a:r>
             <a:endParaRPr lang="en-US" sz="1100" dirty="0"/>
           </a:p>
@@ -4264,7 +4264,7 @@
                   <a:srgbClr val="FFFFFF"/>
                 </a:solidFill>
               </a:rPr>
-              <a:t>Steve Cohen tech venture arm</a:t>
+              <a:t>Decision evidence is the next infrastructure default — every enterprise deploying AI will be required to produce decision evidence under regulatory or legal challenge</a:t>
             </a:r>
             <a:endParaRPr lang="en-US" sz="1400" dirty="0"/>
           </a:p>

--- a/docs/pitch-decks/investor-500/pptx/421-point72.pptx
+++ b/docs/pitch-decks/investor-500/pptx/421-point72.pptx
@@ -5444,6 +5444,30 @@
           </a:p>
         </p:txBody>
       </p:sp>
+      <p:pic>
+        <p:nvPicPr>
+          <p:cNvPr id="28" name="Picture 27" descr="nvidia-inception-program-badge-rgb-for-screen.png"/>
+          <p:cNvPicPr>
+            <a:picLocks noChangeAspect="1"/>
+          </p:cNvPicPr>
+          <p:nvPr/>
+        </p:nvPicPr>
+        <p:blipFill>
+          <a:blip r:embed="rId3"/>
+          <a:stretch>
+            <a:fillRect/>
+          </a:stretch>
+        </p:blipFill>
+        <p:spPr>
+          <a:xfrm>
+            <a:off x="4892040" y="4023360"/>
+            <a:ext cx="1645920" cy="822960"/>
+          </a:xfrm>
+          <a:prstGeom prst="rect">
+            <a:avLst/>
+          </a:prstGeom>
+        </p:spPr>
+      </p:pic>
     </p:spTree>
   </p:cSld>
   <p:clrMapOvr>
